--- a/docs/deck/winebro-deck.pptx
+++ b/docs/deck/winebro-deck.pptx
@@ -3607,29 +3607,73 @@
       </p:sp>
       <p:sp>
         <p:nvSpPr>
-          <p:cNvPr id="4" name="TextBox 3"/>
+          <p:cNvPr id="4" name="Rectangle 3"/>
+          <p:cNvSpPr/>
+          <p:nvPr/>
+        </p:nvSpPr>
+        <p:spPr>
+          <a:xfrm>
+            <a:off x="6089497" y="1371600"/>
+            <a:ext cx="12700" cy="4114800"/>
+          </a:xfrm>
+          <a:prstGeom prst="rect">
+            <a:avLst/>
+          </a:prstGeom>
+          <a:solidFill>
+            <a:srgbClr val="D9A23A"/>
+          </a:solidFill>
+          <a:ln>
+            <a:noFill/>
+          </a:ln>
+          <a:effectLst/>
+        </p:spPr>
+        <p:style>
+          <a:lnRef idx="1">
+            <a:schemeClr val="accent1"/>
+          </a:lnRef>
+          <a:fillRef idx="3">
+            <a:schemeClr val="accent1"/>
+          </a:fillRef>
+          <a:effectRef idx="2">
+            <a:schemeClr val="accent1"/>
+          </a:effectRef>
+          <a:fontRef idx="minor">
+            <a:schemeClr val="lt1"/>
+          </a:fontRef>
+        </p:style>
+        <p:txBody>
+          <a:bodyPr rtlCol="0" anchor="ctr"/>
+          <a:lstStyle/>
+          <a:p>
+            <a:pPr algn="ctr"/>
+          </a:p>
+        </p:txBody>
+      </p:sp>
+      <p:sp>
+        <p:nvSpPr>
+          <p:cNvPr id="5" name="TextBox 4"/>
           <p:cNvSpPr txBox="1"/>
           <p:nvPr/>
         </p:nvSpPr>
         <p:spPr>
           <a:xfrm>
             <a:off x="548640" y="548640"/>
-            <a:ext cx="7315200" cy="365760"/>
-          </a:xfrm>
-          <a:prstGeom prst="rect">
-            <a:avLst/>
-          </a:prstGeom>
-          <a:noFill/>
-        </p:spPr>
-        <p:txBody>
-          <a:bodyPr wrap="square" lIns="0" rIns="0" tIns="0" bIns="0">
-            <a:spAutoFit/>
-          </a:bodyPr>
-          <a:lstStyle/>
-          <a:p>
-            <a:pPr algn="l">
-              <a:lnSpc>
-                <a:spcPct val="120000"/>
+            <a:ext cx="4937760" cy="365760"/>
+          </a:xfrm>
+          <a:prstGeom prst="rect">
+            <a:avLst/>
+          </a:prstGeom>
+          <a:noFill/>
+        </p:spPr>
+        <p:txBody>
+          <a:bodyPr wrap="square" lIns="0" rIns="0" tIns="0" bIns="0">
+            <a:spAutoFit/>
+          </a:bodyPr>
+          <a:lstStyle/>
+          <a:p>
+            <a:pPr algn="l">
+              <a:lnSpc>
+                <a:spcPct val="100000"/>
               </a:lnSpc>
             </a:pPr>
             <a:r>
@@ -3646,33 +3690,33 @@
       </p:sp>
       <p:sp>
         <p:nvSpPr>
-          <p:cNvPr id="5" name="TextBox 4"/>
+          <p:cNvPr id="6" name="TextBox 5"/>
           <p:cNvSpPr txBox="1"/>
           <p:nvPr/>
         </p:nvSpPr>
         <p:spPr>
           <a:xfrm>
             <a:off x="548640" y="1005840"/>
-            <a:ext cx="5303520" cy="1828800"/>
-          </a:xfrm>
-          <a:prstGeom prst="rect">
-            <a:avLst/>
-          </a:prstGeom>
-          <a:noFill/>
-        </p:spPr>
-        <p:txBody>
-          <a:bodyPr wrap="square" lIns="0" rIns="0" tIns="0" bIns="0">
-            <a:spAutoFit/>
-          </a:bodyPr>
-          <a:lstStyle/>
-          <a:p>
-            <a:pPr algn="l">
-              <a:lnSpc>
-                <a:spcPct val="100000"/>
-              </a:lnSpc>
-            </a:pPr>
-            <a:r>
-              <a:rPr sz="4200" b="1" i="0">
+            <a:ext cx="4937760" cy="2194560"/>
+          </a:xfrm>
+          <a:prstGeom prst="rect">
+            <a:avLst/>
+          </a:prstGeom>
+          <a:noFill/>
+        </p:spPr>
+        <p:txBody>
+          <a:bodyPr wrap="square" lIns="0" rIns="0" tIns="0" bIns="0">
+            <a:spAutoFit/>
+          </a:bodyPr>
+          <a:lstStyle/>
+          <a:p>
+            <a:pPr algn="l">
+              <a:lnSpc>
+                <a:spcPct val="95000"/>
+              </a:lnSpc>
+            </a:pPr>
+            <a:r>
+              <a:rPr sz="4400" b="1" i="0">
                 <a:solidFill>
                   <a:srgbClr val="FAEFD8"/>
                 </a:solidFill>
@@ -3686,14 +3730,14 @@
       </p:sp>
       <p:sp>
         <p:nvSpPr>
-          <p:cNvPr id="6" name="TextBox 5"/>
-          <p:cNvSpPr txBox="1"/>
-          <p:nvPr/>
-        </p:nvSpPr>
-        <p:spPr>
-          <a:xfrm>
-            <a:off x="548640" y="3200400"/>
-            <a:ext cx="5303520" cy="1371600"/>
+          <p:cNvPr id="7" name="TextBox 6"/>
+          <p:cNvSpPr txBox="1"/>
+          <p:nvPr/>
+        </p:nvSpPr>
+        <p:spPr>
+          <a:xfrm>
+            <a:off x="548640" y="3291840"/>
+            <a:ext cx="4937760" cy="1371600"/>
           </a:xfrm>
           <a:prstGeom prst="rect">
             <a:avLst/>
@@ -3725,14 +3769,14 @@
       </p:sp>
       <p:sp>
         <p:nvSpPr>
-          <p:cNvPr id="7" name="TextBox 6"/>
-          <p:cNvSpPr txBox="1"/>
-          <p:nvPr/>
-        </p:nvSpPr>
-        <p:spPr>
-          <a:xfrm>
-            <a:off x="548640" y="4754880"/>
-            <a:ext cx="5303520" cy="457200"/>
+          <p:cNvPr id="8" name="TextBox 7"/>
+          <p:cNvSpPr txBox="1"/>
+          <p:nvPr/>
+        </p:nvSpPr>
+        <p:spPr>
+          <a:xfrm>
+            <a:off x="548640" y="4846320"/>
+            <a:ext cx="4937760" cy="457200"/>
           </a:xfrm>
           <a:prstGeom prst="rect">
             <a:avLst/>
@@ -3764,14 +3808,14 @@
       </p:sp>
       <p:sp>
         <p:nvSpPr>
-          <p:cNvPr id="8" name="TextBox 7"/>
-          <p:cNvSpPr txBox="1"/>
-          <p:nvPr/>
-        </p:nvSpPr>
-        <p:spPr>
-          <a:xfrm>
-            <a:off x="548640" y="5166360"/>
-            <a:ext cx="5303520" cy="457200"/>
+          <p:cNvPr id="9" name="TextBox 8"/>
+          <p:cNvSpPr txBox="1"/>
+          <p:nvPr/>
+        </p:nvSpPr>
+        <p:spPr>
+          <a:xfrm>
+            <a:off x="548640" y="5257800"/>
+            <a:ext cx="4937760" cy="457200"/>
           </a:xfrm>
           <a:prstGeom prst="rect">
             <a:avLst/>
@@ -3803,14 +3847,14 @@
       </p:sp>
       <p:sp>
         <p:nvSpPr>
-          <p:cNvPr id="9" name="TextBox 8"/>
-          <p:cNvSpPr txBox="1"/>
-          <p:nvPr/>
-        </p:nvSpPr>
-        <p:spPr>
-          <a:xfrm>
-            <a:off x="548640" y="5577840"/>
-            <a:ext cx="5303520" cy="457200"/>
+          <p:cNvPr id="10" name="TextBox 9"/>
+          <p:cNvSpPr txBox="1"/>
+          <p:nvPr/>
+        </p:nvSpPr>
+        <p:spPr>
+          <a:xfrm>
+            <a:off x="548640" y="5669280"/>
+            <a:ext cx="4937760" cy="457200"/>
           </a:xfrm>
           <a:prstGeom prst="rect">
             <a:avLst/>
@@ -3842,29 +3886,29 @@
       </p:sp>
       <p:sp>
         <p:nvSpPr>
-          <p:cNvPr id="10" name="TextBox 9"/>
-          <p:cNvSpPr txBox="1"/>
-          <p:nvPr/>
-        </p:nvSpPr>
-        <p:spPr>
-          <a:xfrm>
-            <a:off x="6400800" y="548640"/>
-            <a:ext cx="7315200" cy="365760"/>
-          </a:xfrm>
-          <a:prstGeom prst="rect">
-            <a:avLst/>
-          </a:prstGeom>
-          <a:noFill/>
-        </p:spPr>
-        <p:txBody>
-          <a:bodyPr wrap="square" lIns="0" rIns="0" tIns="0" bIns="0">
-            <a:spAutoFit/>
-          </a:bodyPr>
-          <a:lstStyle/>
-          <a:p>
-            <a:pPr algn="l">
-              <a:lnSpc>
-                <a:spcPct val="120000"/>
+          <p:cNvPr id="11" name="TextBox 10"/>
+          <p:cNvSpPr txBox="1"/>
+          <p:nvPr/>
+        </p:nvSpPr>
+        <p:spPr>
+          <a:xfrm>
+            <a:off x="6644487" y="548640"/>
+            <a:ext cx="4937760" cy="365760"/>
+          </a:xfrm>
+          <a:prstGeom prst="rect">
+            <a:avLst/>
+          </a:prstGeom>
+          <a:noFill/>
+        </p:spPr>
+        <p:txBody>
+          <a:bodyPr wrap="square" lIns="0" rIns="0" tIns="0" bIns="0">
+            <a:spAutoFit/>
+          </a:bodyPr>
+          <a:lstStyle/>
+          <a:p>
+            <a:pPr algn="l">
+              <a:lnSpc>
+                <a:spcPct val="100000"/>
               </a:lnSpc>
             </a:pPr>
             <a:r>
@@ -3881,33 +3925,33 @@
       </p:sp>
       <p:sp>
         <p:nvSpPr>
-          <p:cNvPr id="11" name="TextBox 10"/>
-          <p:cNvSpPr txBox="1"/>
-          <p:nvPr/>
-        </p:nvSpPr>
-        <p:spPr>
-          <a:xfrm>
-            <a:off x="6400800" y="1005840"/>
-            <a:ext cx="5303520" cy="1828800"/>
-          </a:xfrm>
-          <a:prstGeom prst="rect">
-            <a:avLst/>
-          </a:prstGeom>
-          <a:noFill/>
-        </p:spPr>
-        <p:txBody>
-          <a:bodyPr wrap="square" lIns="0" rIns="0" tIns="0" bIns="0">
-            <a:spAutoFit/>
-          </a:bodyPr>
-          <a:lstStyle/>
-          <a:p>
-            <a:pPr algn="l">
-              <a:lnSpc>
-                <a:spcPct val="100000"/>
-              </a:lnSpc>
-            </a:pPr>
-            <a:r>
-              <a:rPr sz="4200" b="1" i="0">
+          <p:cNvPr id="12" name="TextBox 11"/>
+          <p:cNvSpPr txBox="1"/>
+          <p:nvPr/>
+        </p:nvSpPr>
+        <p:spPr>
+          <a:xfrm>
+            <a:off x="6644487" y="1005840"/>
+            <a:ext cx="4937760" cy="2194560"/>
+          </a:xfrm>
+          <a:prstGeom prst="rect">
+            <a:avLst/>
+          </a:prstGeom>
+          <a:noFill/>
+        </p:spPr>
+        <p:txBody>
+          <a:bodyPr wrap="square" lIns="0" rIns="0" tIns="0" bIns="0">
+            <a:spAutoFit/>
+          </a:bodyPr>
+          <a:lstStyle/>
+          <a:p>
+            <a:pPr algn="l">
+              <a:lnSpc>
+                <a:spcPct val="95000"/>
+              </a:lnSpc>
+            </a:pPr>
+            <a:r>
+              <a:rPr sz="4400" b="1" i="0">
                 <a:solidFill>
                   <a:srgbClr val="FAEFD8"/>
                 </a:solidFill>
@@ -3921,14 +3965,14 @@
       </p:sp>
       <p:sp>
         <p:nvSpPr>
-          <p:cNvPr id="12" name="TextBox 11"/>
-          <p:cNvSpPr txBox="1"/>
-          <p:nvPr/>
-        </p:nvSpPr>
-        <p:spPr>
-          <a:xfrm>
-            <a:off x="6400800" y="3200400"/>
-            <a:ext cx="5303520" cy="1371600"/>
+          <p:cNvPr id="13" name="TextBox 12"/>
+          <p:cNvSpPr txBox="1"/>
+          <p:nvPr/>
+        </p:nvSpPr>
+        <p:spPr>
+          <a:xfrm>
+            <a:off x="6644487" y="3291840"/>
+            <a:ext cx="4937760" cy="1371600"/>
           </a:xfrm>
           <a:prstGeom prst="rect">
             <a:avLst/>
@@ -3960,14 +4004,14 @@
       </p:sp>
       <p:sp>
         <p:nvSpPr>
-          <p:cNvPr id="13" name="TextBox 12"/>
-          <p:cNvSpPr txBox="1"/>
-          <p:nvPr/>
-        </p:nvSpPr>
-        <p:spPr>
-          <a:xfrm>
-            <a:off x="6400800" y="4754880"/>
-            <a:ext cx="5303520" cy="457200"/>
+          <p:cNvPr id="14" name="TextBox 13"/>
+          <p:cNvSpPr txBox="1"/>
+          <p:nvPr/>
+        </p:nvSpPr>
+        <p:spPr>
+          <a:xfrm>
+            <a:off x="6644487" y="4846320"/>
+            <a:ext cx="4937760" cy="457200"/>
           </a:xfrm>
           <a:prstGeom prst="rect">
             <a:avLst/>
@@ -3999,14 +4043,14 @@
       </p:sp>
       <p:sp>
         <p:nvSpPr>
-          <p:cNvPr id="14" name="TextBox 13"/>
-          <p:cNvSpPr txBox="1"/>
-          <p:nvPr/>
-        </p:nvSpPr>
-        <p:spPr>
-          <a:xfrm>
-            <a:off x="6400800" y="5166360"/>
-            <a:ext cx="5303520" cy="457200"/>
+          <p:cNvPr id="15" name="TextBox 14"/>
+          <p:cNvSpPr txBox="1"/>
+          <p:nvPr/>
+        </p:nvSpPr>
+        <p:spPr>
+          <a:xfrm>
+            <a:off x="6644487" y="5257800"/>
+            <a:ext cx="4937760" cy="457200"/>
           </a:xfrm>
           <a:prstGeom prst="rect">
             <a:avLst/>
@@ -4038,14 +4082,14 @@
       </p:sp>
       <p:sp>
         <p:nvSpPr>
-          <p:cNvPr id="15" name="TextBox 14"/>
-          <p:cNvSpPr txBox="1"/>
-          <p:nvPr/>
-        </p:nvSpPr>
-        <p:spPr>
-          <a:xfrm>
-            <a:off x="6400800" y="5577840"/>
-            <a:ext cx="5303520" cy="457200"/>
+          <p:cNvPr id="16" name="TextBox 15"/>
+          <p:cNvSpPr txBox="1"/>
+          <p:nvPr/>
+        </p:nvSpPr>
+        <p:spPr>
+          <a:xfrm>
+            <a:off x="6644487" y="5669280"/>
+            <a:ext cx="4937760" cy="457200"/>
           </a:xfrm>
           <a:prstGeom prst="rect">
             <a:avLst/>
@@ -4077,14 +4121,14 @@
       </p:sp>
       <p:sp>
         <p:nvSpPr>
-          <p:cNvPr id="16" name="TextBox 15"/>
-          <p:cNvSpPr txBox="1"/>
-          <p:nvPr/>
-        </p:nvSpPr>
-        <p:spPr>
-          <a:xfrm>
-            <a:off x="6400800" y="5989320"/>
-            <a:ext cx="5303520" cy="457200"/>
+          <p:cNvPr id="17" name="TextBox 16"/>
+          <p:cNvSpPr txBox="1"/>
+          <p:nvPr/>
+        </p:nvSpPr>
+        <p:spPr>
+          <a:xfrm>
+            <a:off x="6644487" y="6080760"/>
+            <a:ext cx="4937760" cy="457200"/>
           </a:xfrm>
           <a:prstGeom prst="rect">
             <a:avLst/>
@@ -4116,7 +4160,7 @@
       </p:sp>
       <p:sp>
         <p:nvSpPr>
-          <p:cNvPr id="17" name="TextBox 16"/>
+          <p:cNvPr id="18" name="TextBox 17"/>
           <p:cNvSpPr txBox="1"/>
           <p:nvPr/>
         </p:nvSpPr>
@@ -4155,7 +4199,7 @@
       </p:sp>
       <p:sp>
         <p:nvSpPr>
-          <p:cNvPr id="18" name="TextBox 17"/>
+          <p:cNvPr id="19" name="TextBox 18"/>
           <p:cNvSpPr txBox="1"/>
           <p:nvPr/>
         </p:nvSpPr>
